--- a/dhruv-athlete-healthcheck/Dhruv_Athlete_Physique_HealthCheck_Deck.pptx
+++ b/dhruv-athlete-healthcheck/Dhruv_Athlete_Physique_HealthCheck_Deck.pptx
@@ -122,49 +122,49 @@
   <p:extLst>
     <p:ext uri="{521415D9-36F7-43E2-AB2F-B90AF26B5E84}">
       <p14:sectionLst xmlns:p14="http://schemas.microsoft.com/office/powerpoint/2010/main">
-        <p14:section name="Introduction" id="{5ee49eac-792d-9e04-a408-31841602e3e1}">
+        <p14:section name="Introduction" id="{d692fe14-c4fe-31af-371e-6856c3c53a1e}">
           <p14:sldIdLst>
             <p14:sldId id="256"/>
           </p14:sldIdLst>
         </p14:section>
-        <p14:section name="Rationale and plans" id="{593106aa-715f-432d-a190-921aa34ab5e3}">
+        <p14:section name="Rationale and plans" id="{b6fdf2bb-1238-ded4-1312-6931e87ea6f8}">
           <p14:sldIdLst>
             <p14:sldId id="257"/>
             <p14:sldId id="258"/>
           </p14:sldIdLst>
         </p14:section>
-        <p14:section name="Heart and lipids" id="{9da86fb8-2112-68c6-9a84-59243b0bd3d8}">
+        <p14:section name="Heart and lipids" id="{678a4751-e0d6-3951-27a3-f689c2757311}">
           <p14:sldIdLst>
             <p14:sldId id="259"/>
             <p14:sldId id="260"/>
             <p14:sldId id="261"/>
           </p14:sldIdLst>
         </p14:section>
-        <p14:section name="Muscle, hormones and longevity" id="{5f7fdca3-d661-eff7-8624-fa802319790d}">
+        <p14:section name="Muscle, hormones and longevity" id="{624f4482-248c-ab06-70c5-a6d1c6038829}">
           <p14:sldIdLst>
             <p14:sldId id="262"/>
             <p14:sldId id="263"/>
             <p14:sldId id="264"/>
           </p14:sldIdLst>
         </p14:section>
-        <p14:section name="Tendons and ligaments" id="{a1ae2a70-2dda-bf00-e606-6e2f6609e605}">
+        <p14:section name="Tendons and ligaments" id="{b4e8de9e-1587-2948-5bbc-7c69e81e7290}">
           <p14:sldIdLst>
             <p14:sldId id="265"/>
           </p14:sldIdLst>
         </p14:section>
-        <p14:section name="Doping and drug screening" id="{a0cc73bc-15b6-c38f-3cfd-56681c2f89f7}">
+        <p14:section name="Doping and drug screening" id="{43ebc06a-308a-e92d-dd78-1619c5683283}">
           <p14:sldIdLst>
             <p14:sldId id="266"/>
             <p14:sldId id="267"/>
           </p14:sldIdLst>
         </p14:section>
-        <p14:section name="Recovery and visit" id="{dad63441-618b-ae7c-4257-3e6902bb1290}">
+        <p14:section name="Recovery and visit" id="{771f90dd-d95f-5dac-9634-86f630981c9b}">
           <p14:sldIdLst>
             <p14:sldId id="268"/>
             <p14:sldId id="269"/>
           </p14:sldIdLst>
         </p14:section>
-        <p14:section name="Sources" id="{b1e5c892-3447-84fc-bc4c-2a9a9998b5d5}">
+        <p14:section name="Sources" id="{2ed0a438-44e4-b3c0-1c39-d81138d0c36a}">
           <p14:sldIdLst>
             <p14:sldId id="270"/>
             <p14:sldId id="271"/>

--- a/dhruv-athlete-healthcheck/Dhruv_Athlete_Physique_HealthCheck_Deck.pptx
+++ b/dhruv-athlete-healthcheck/Dhruv_Athlete_Physique_HealthCheck_Deck.pptx
@@ -122,49 +122,49 @@
   <p:extLst>
     <p:ext uri="{521415D9-36F7-43E2-AB2F-B90AF26B5E84}">
       <p14:sectionLst xmlns:p14="http://schemas.microsoft.com/office/powerpoint/2010/main">
-        <p14:section name="Introduction" id="{d692fe14-c4fe-31af-371e-6856c3c53a1e}">
+        <p14:section name="Introduction" id="{3a57ef14-7eeb-169f-4932-8e7489966e50}">
           <p14:sldIdLst>
             <p14:sldId id="256"/>
           </p14:sldIdLst>
         </p14:section>
-        <p14:section name="Rationale and plans" id="{b6fdf2bb-1238-ded4-1312-6931e87ea6f8}">
+        <p14:section name="Rationale and plans" id="{c5f80793-7e2d-42ee-8feb-bb97e19a8e87}">
           <p14:sldIdLst>
             <p14:sldId id="257"/>
             <p14:sldId id="258"/>
           </p14:sldIdLst>
         </p14:section>
-        <p14:section name="Heart and lipids" id="{678a4751-e0d6-3951-27a3-f689c2757311}">
+        <p14:section name="Heart and lipids" id="{20e74fe9-7b7d-84e8-0ec0-5614c3e657d9}">
           <p14:sldIdLst>
             <p14:sldId id="259"/>
             <p14:sldId id="260"/>
             <p14:sldId id="261"/>
           </p14:sldIdLst>
         </p14:section>
-        <p14:section name="Muscle, hormones and longevity" id="{624f4482-248c-ab06-70c5-a6d1c6038829}">
+        <p14:section name="Muscle, hormones and longevity" id="{8babac8b-375e-5e4d-3ccd-ed346933d0d0}">
           <p14:sldIdLst>
             <p14:sldId id="262"/>
             <p14:sldId id="263"/>
             <p14:sldId id="264"/>
           </p14:sldIdLst>
         </p14:section>
-        <p14:section name="Tendons and ligaments" id="{b4e8de9e-1587-2948-5bbc-7c69e81e7290}">
+        <p14:section name="Tendons and ligaments" id="{89c00225-fba6-9bc7-0500-42c8662b5f06}">
           <p14:sldIdLst>
             <p14:sldId id="265"/>
           </p14:sldIdLst>
         </p14:section>
-        <p14:section name="Doping and drug screening" id="{43ebc06a-308a-e92d-dd78-1619c5683283}">
+        <p14:section name="Doping and drug screening" id="{88904ec8-d631-3093-5c43-7d927db26df4}">
           <p14:sldIdLst>
             <p14:sldId id="266"/>
             <p14:sldId id="267"/>
           </p14:sldIdLst>
         </p14:section>
-        <p14:section name="Recovery and visit" id="{771f90dd-d95f-5dac-9634-86f630981c9b}">
+        <p14:section name="Recovery and visit" id="{71b32597-8648-13d0-2d52-529686e7e4b0}">
           <p14:sldIdLst>
             <p14:sldId id="268"/>
             <p14:sldId id="269"/>
           </p14:sldIdLst>
         </p14:section>
-        <p14:section name="Sources" id="{2ed0a438-44e4-b3c0-1c39-d81138d0c36a}">
+        <p14:section name="Sources" id="{531d6973-7354-e180-efa9-a976e70c90a0}">
           <p14:sldIdLst>
             <p14:sldId id="270"/>
             <p14:sldId id="271"/>
@@ -2978,16 +2978,40 @@
           </a:p>
         </p:txBody>
       </p:sp>
+      <p:pic>
+        <p:nvPicPr>
+          <p:cNvPr id="3" name="Image 0" descr="/tmp/claude-0/-home-user-BlisteringBlockchain/d9fb2d6e-0573-5890-9b54-a37c96abb606/scratchpad/art/logo_mark.png">    </p:cNvPr>
+          <p:cNvPicPr>
+            <a:picLocks noChangeAspect="1"/>
+          </p:cNvPicPr>
+          <p:nvPr/>
+        </p:nvPicPr>
+        <p:blipFill>
+          <a:blip r:embed="rId1"/>
+          <a:stretch>
+            <a:fillRect/>
+          </a:stretch>
+        </p:blipFill>
+        <p:spPr>
+          <a:xfrm>
+            <a:off x="457200" y="4709160"/>
+            <a:ext cx="246888" cy="306324"/>
+          </a:xfrm>
+          <a:prstGeom prst="rect">
+            <a:avLst/>
+          </a:prstGeom>
+        </p:spPr>
+      </p:pic>
       <p:sp>
         <p:nvSpPr>
-          <p:cNvPr id="3" name="Text 0"/>
+          <p:cNvPr id="4" name="Text 0"/>
           <p:cNvSpPr/>
           <p:nvPr/>
         </p:nvSpPr>
         <p:spPr>
           <a:xfrm>
-            <a:off x="457200" y="4773168"/>
-            <a:ext cx="5943600" cy="201168"/>
+            <a:off x="786384" y="4773168"/>
+            <a:ext cx="5669280" cy="201168"/>
           </a:xfrm>
           <a:prstGeom prst="rect">
             <a:avLst/>
@@ -3422,15 +3446,39 @@
           <a:chExt cx="0" cy="0"/>
         </a:xfrm>
       </p:grpSpPr>
+      <p:pic>
+        <p:nvPicPr>
+          <p:cNvPr id="2" name="Image 0" descr="Dhruv Diagnostics logo">    </p:cNvPr>
+          <p:cNvPicPr>
+            <a:picLocks noChangeAspect="1"/>
+          </p:cNvPicPr>
+          <p:nvPr/>
+        </p:nvPicPr>
+        <p:blipFill>
+          <a:blip r:embed="rId2"/>
+          <a:stretch>
+            <a:fillRect/>
+          </a:stretch>
+        </p:blipFill>
+        <p:spPr>
+          <a:xfrm>
+            <a:off x="548640" y="365760"/>
+            <a:ext cx="594360" cy="737006"/>
+          </a:xfrm>
+          <a:prstGeom prst="rect">
+            <a:avLst/>
+          </a:prstGeom>
+        </p:spPr>
+      </p:pic>
       <p:sp>
         <p:nvSpPr>
-          <p:cNvPr id="2" name="Text 0"/>
+          <p:cNvPr id="3" name="Text 0"/>
           <p:cNvSpPr txBox="1"/>
           <p:nvPr/>
         </p:nvSpPr>
         <p:spPr>
           <a:xfrm>
-            <a:off x="548640" y="457200"/>
+            <a:off x="1261872" y="457200"/>
             <a:ext cx="2743200" cy="640080"/>
           </a:xfrm>
           <a:prstGeom prst="rect">
@@ -3474,7 +3522,7 @@
       </p:sp>
       <p:sp>
         <p:nvSpPr>
-          <p:cNvPr id="3" name="Text 1"/>
+          <p:cNvPr id="4" name="Text 1"/>
           <p:cNvSpPr txBox="1"/>
           <p:nvPr/>
         </p:nvSpPr>
@@ -3510,7 +3558,7 @@
       </p:sp>
       <p:sp>
         <p:nvSpPr>
-          <p:cNvPr id="4" name="Text 2"/>
+          <p:cNvPr id="5" name="Text 2"/>
           <p:cNvSpPr txBox="1"/>
           <p:nvPr/>
         </p:nvSpPr>
@@ -3546,7 +3594,7 @@
       </p:sp>
       <p:sp>
         <p:nvSpPr>
-          <p:cNvPr id="5" name="Text 3"/>
+          <p:cNvPr id="6" name="Text 3"/>
           <p:cNvSpPr txBox="1"/>
           <p:nvPr/>
         </p:nvSpPr>
@@ -11215,15 +11263,39 @@
           <a:chExt cx="0" cy="0"/>
         </a:xfrm>
       </p:grpSpPr>
+      <p:pic>
+        <p:nvPicPr>
+          <p:cNvPr id="2" name="Image 0" descr="Dhruv Diagnostics logo">    </p:cNvPr>
+          <p:cNvPicPr>
+            <a:picLocks noChangeAspect="1"/>
+          </p:cNvPicPr>
+          <p:nvPr/>
+        </p:nvPicPr>
+        <p:blipFill>
+          <a:blip r:embed="rId2"/>
+          <a:stretch>
+            <a:fillRect/>
+          </a:stretch>
+        </p:blipFill>
+        <p:spPr>
+          <a:xfrm>
+            <a:off x="548640" y="329184"/>
+            <a:ext cx="475488" cy="589788"/>
+          </a:xfrm>
+          <a:prstGeom prst="rect">
+            <a:avLst/>
+          </a:prstGeom>
+        </p:spPr>
+      </p:pic>
       <p:sp>
         <p:nvSpPr>
-          <p:cNvPr id="2" name="Text 0"/>
+          <p:cNvPr id="3" name="Text 0"/>
           <p:cNvSpPr txBox="1"/>
           <p:nvPr/>
         </p:nvSpPr>
         <p:spPr>
           <a:xfrm>
-            <a:off x="548640" y="411480"/>
+            <a:off x="1115568" y="411480"/>
             <a:ext cx="2743200" cy="502920"/>
           </a:xfrm>
           <a:prstGeom prst="rect">
@@ -11267,7 +11339,7 @@
       </p:sp>
       <p:sp>
         <p:nvSpPr>
-          <p:cNvPr id="3" name="Text 1"/>
+          <p:cNvPr id="4" name="Text 1"/>
           <p:cNvSpPr txBox="1"/>
           <p:nvPr/>
         </p:nvSpPr>
@@ -11303,7 +11375,7 @@
       </p:sp>
       <p:sp>
         <p:nvSpPr>
-          <p:cNvPr id="4" name="Text 2"/>
+          <p:cNvPr id="5" name="Text 2"/>
           <p:cNvSpPr txBox="1"/>
           <p:nvPr/>
         </p:nvSpPr>
@@ -11350,7 +11422,7 @@
       </p:sp>
       <p:sp>
         <p:nvSpPr>
-          <p:cNvPr id="5" name="Text 3"/>
+          <p:cNvPr id="6" name="Text 3"/>
           <p:cNvSpPr txBox="1"/>
           <p:nvPr/>
         </p:nvSpPr>
@@ -11386,7 +11458,7 @@
       </p:sp>
       <p:sp>
         <p:nvSpPr>
-          <p:cNvPr id="6" name="Text 4"/>
+          <p:cNvPr id="7" name="Text 4"/>
           <p:cNvSpPr txBox="1"/>
           <p:nvPr/>
         </p:nvSpPr>
@@ -11433,7 +11505,7 @@
       </p:sp>
       <p:sp>
         <p:nvSpPr>
-          <p:cNvPr id="7" name="Text 5"/>
+          <p:cNvPr id="8" name="Text 5"/>
           <p:cNvSpPr txBox="1"/>
           <p:nvPr/>
         </p:nvSpPr>
@@ -11469,7 +11541,7 @@
       </p:sp>
       <p:sp>
         <p:nvSpPr>
-          <p:cNvPr id="8" name="Text 6"/>
+          <p:cNvPr id="9" name="Text 6"/>
           <p:cNvSpPr txBox="1"/>
           <p:nvPr/>
         </p:nvSpPr>
@@ -11505,7 +11577,7 @@
       </p:sp>
       <p:sp>
         <p:nvSpPr>
-          <p:cNvPr id="9" name="Shape 7"/>
+          <p:cNvPr id="10" name="Shape 7"/>
           <p:cNvSpPr/>
           <p:nvPr/>
         </p:nvSpPr>
@@ -11530,14 +11602,14 @@
       </p:sp>
       <p:pic>
         <p:nvPicPr>
-          <p:cNvPr id="10" name="Image 0" descr="Website QR code">    </p:cNvPr>
+          <p:cNvPr id="11" name="Image 1" descr="Website QR code">    </p:cNvPr>
           <p:cNvPicPr>
             <a:picLocks noChangeAspect="1"/>
           </p:cNvPicPr>
           <p:nvPr/>
         </p:nvPicPr>
         <p:blipFill>
-          <a:blip r:embed="rId2"/>
+          <a:blip r:embed="rId3"/>
           <a:stretch>
             <a:fillRect/>
           </a:stretch>
@@ -11554,7 +11626,7 @@
       </p:pic>
       <p:sp>
         <p:nvSpPr>
-          <p:cNvPr id="11" name="Shape 8"/>
+          <p:cNvPr id="12" name="Shape 8"/>
           <p:cNvSpPr/>
           <p:nvPr/>
         </p:nvSpPr>
@@ -11579,14 +11651,14 @@
       </p:sp>
       <p:pic>
         <p:nvPicPr>
-          <p:cNvPr id="12" name="Image 1" descr="Map: Laxmi Nagar QR code">    </p:cNvPr>
+          <p:cNvPr id="13" name="Image 2" descr="Map: Laxmi Nagar QR code">    </p:cNvPr>
           <p:cNvPicPr>
             <a:picLocks noChangeAspect="1"/>
           </p:cNvPicPr>
           <p:nvPr/>
         </p:nvPicPr>
         <p:blipFill>
-          <a:blip r:embed="rId3"/>
+          <a:blip r:embed="rId4"/>
           <a:stretch>
             <a:fillRect/>
           </a:stretch>
@@ -11603,7 +11675,7 @@
       </p:pic>
       <p:sp>
         <p:nvSpPr>
-          <p:cNvPr id="13" name="Shape 9"/>
+          <p:cNvPr id="14" name="Shape 9"/>
           <p:cNvSpPr/>
           <p:nvPr/>
         </p:nvSpPr>
@@ -11628,14 +11700,14 @@
       </p:sp>
       <p:pic>
         <p:nvPicPr>
-          <p:cNvPr id="14" name="Image 2" descr="Map: Ramdaspeth QR code">    </p:cNvPr>
+          <p:cNvPr id="15" name="Image 3" descr="Map: Ramdaspeth QR code">    </p:cNvPr>
           <p:cNvPicPr>
             <a:picLocks noChangeAspect="1"/>
           </p:cNvPicPr>
           <p:nvPr/>
         </p:nvPicPr>
         <p:blipFill>
-          <a:blip r:embed="rId4"/>
+          <a:blip r:embed="rId5"/>
           <a:stretch>
             <a:fillRect/>
           </a:stretch>
@@ -11652,7 +11724,7 @@
       </p:pic>
       <p:sp>
         <p:nvSpPr>
-          <p:cNvPr id="15" name="Text 10"/>
+          <p:cNvPr id="16" name="Text 10"/>
           <p:cNvSpPr txBox="1"/>
           <p:nvPr/>
         </p:nvSpPr>
@@ -11688,7 +11760,7 @@
       </p:sp>
       <p:sp>
         <p:nvSpPr>
-          <p:cNvPr id="16" name="Text 11"/>
+          <p:cNvPr id="17" name="Text 11"/>
           <p:cNvSpPr txBox="1"/>
           <p:nvPr/>
         </p:nvSpPr>
@@ -11724,7 +11796,7 @@
       </p:sp>
       <p:sp>
         <p:nvSpPr>
-          <p:cNvPr id="17" name="Text 12"/>
+          <p:cNvPr id="18" name="Text 12"/>
           <p:cNvSpPr txBox="1"/>
           <p:nvPr/>
         </p:nvSpPr>

--- a/dhruv-athlete-healthcheck/Dhruv_Athlete_Physique_HealthCheck_Deck.pptx
+++ b/dhruv-athlete-healthcheck/Dhruv_Athlete_Physique_HealthCheck_Deck.pptx
@@ -122,49 +122,49 @@
   <p:extLst>
     <p:ext uri="{521415D9-36F7-43E2-AB2F-B90AF26B5E84}">
       <p14:sectionLst xmlns:p14="http://schemas.microsoft.com/office/powerpoint/2010/main">
-        <p14:section name="Introduction" id="{3a57ef14-7eeb-169f-4932-8e7489966e50}">
+        <p14:section name="Introduction" id="{d012fd39-aa28-ee9d-2dff-2ed860454f26}">
           <p14:sldIdLst>
             <p14:sldId id="256"/>
           </p14:sldIdLst>
         </p14:section>
-        <p14:section name="Rationale and plans" id="{c5f80793-7e2d-42ee-8feb-bb97e19a8e87}">
+        <p14:section name="Rationale and plans" id="{299f276c-9715-939e-cffc-8adfbd97d8d7}">
           <p14:sldIdLst>
             <p14:sldId id="257"/>
             <p14:sldId id="258"/>
           </p14:sldIdLst>
         </p14:section>
-        <p14:section name="Heart and lipids" id="{20e74fe9-7b7d-84e8-0ec0-5614c3e657d9}">
+        <p14:section name="Heart and lipids" id="{d2013987-6858-1dde-6cf9-749da0f8673a}">
           <p14:sldIdLst>
             <p14:sldId id="259"/>
             <p14:sldId id="260"/>
             <p14:sldId id="261"/>
           </p14:sldIdLst>
         </p14:section>
-        <p14:section name="Muscle, hormones and longevity" id="{8babac8b-375e-5e4d-3ccd-ed346933d0d0}">
+        <p14:section name="Muscle, hormones and longevity" id="{07228b50-cbf6-5dbf-958b-02335707a97c}">
           <p14:sldIdLst>
             <p14:sldId id="262"/>
             <p14:sldId id="263"/>
             <p14:sldId id="264"/>
           </p14:sldIdLst>
         </p14:section>
-        <p14:section name="Tendons and ligaments" id="{89c00225-fba6-9bc7-0500-42c8662b5f06}">
+        <p14:section name="Tendons and ligaments" id="{f38bb1d7-6818-c1e6-e88b-e60b42c6dea8}">
           <p14:sldIdLst>
             <p14:sldId id="265"/>
           </p14:sldIdLst>
         </p14:section>
-        <p14:section name="Doping and drug screening" id="{88904ec8-d631-3093-5c43-7d927db26df4}">
+        <p14:section name="Doping and drug screening" id="{f0000f27-716e-bee3-1685-2a9de923db2d}">
           <p14:sldIdLst>
             <p14:sldId id="266"/>
             <p14:sldId id="267"/>
           </p14:sldIdLst>
         </p14:section>
-        <p14:section name="Recovery and visit" id="{71b32597-8648-13d0-2d52-529686e7e4b0}">
+        <p14:section name="Recovery and visit" id="{4d97bea6-281b-5df0-0d09-122cfa4d150c}">
           <p14:sldIdLst>
             <p14:sldId id="268"/>
             <p14:sldId id="269"/>
           </p14:sldIdLst>
         </p14:section>
-        <p14:section name="Sources" id="{531d6973-7354-e180-efa9-a976e70c90a0}">
+        <p14:section name="Sources" id="{f8b445c0-3729-c4a6-e130-248b718c3661}">
           <p14:sldIdLst>
             <p14:sldId id="270"/>
             <p14:sldId id="271"/>
@@ -2280,7 +2280,7 @@
           <a:p>
             <a:r>
               <a:rPr lang="en-US" dirty="0"/>
-              <a:t>Proposed structure. Final inclusions, ultrasound region counts and prices to be confirmed by the Dhruv clinical team.</a:t>
+              <a:t>Proposed structure and launch prices, set from 2026 market rates for each test. Final inclusions, ultrasound region counts and prices to be confirmed by Dhruv management. Extra ultrasound region: ₹999.</a:t>
             </a:r>
             <a:endParaRPr lang="en-US" dirty="0"/>
           </a:p>
@@ -12166,7 +12166,7 @@
           </p:nvPr>
         </p:nvGraphicFramePr>
         <p:xfrm>
-          <a:off x="457200" y="1051560"/>
+          <a:off x="457200" y="1005840"/>
           <a:ext cx="8229600" cy="914400"/>
         </p:xfrm>
         <a:graphic>
@@ -12179,7 +12179,7 @@
                 <a:gridCol w="1188720"/>
                 <a:gridCol w="1371600"/>
               </a:tblGrid>
-              <a:tr h="265176">
+              <a:tr h="239573">
                 <a:tc>
                   <a:txBody>
                     <a:bodyPr/>
@@ -12453,7 +12453,7 @@
                   </a:tcPr>
                 </a:tc>
               </a:tr>
-              <a:tr h="265176">
+              <a:tr h="239573">
                 <a:tc>
                   <a:txBody>
                     <a:bodyPr/>
@@ -12727,7 +12727,7 @@
                   </a:tcPr>
                 </a:tc>
               </a:tr>
-              <a:tr h="265176">
+              <a:tr h="239573">
                 <a:tc>
                   <a:txBody>
                     <a:bodyPr/>
@@ -13001,7 +13001,7 @@
                   </a:tcPr>
                 </a:tc>
               </a:tr>
-              <a:tr h="265176">
+              <a:tr h="239573">
                 <a:tc>
                   <a:txBody>
                     <a:bodyPr/>
@@ -13275,7 +13275,7 @@
                   </a:tcPr>
                 </a:tc>
               </a:tr>
-              <a:tr h="265176">
+              <a:tr h="239573">
                 <a:tc>
                   <a:txBody>
                     <a:bodyPr/>
@@ -13549,7 +13549,7 @@
                   </a:tcPr>
                 </a:tc>
               </a:tr>
-              <a:tr h="265176">
+              <a:tr h="239573">
                 <a:tc>
                   <a:txBody>
                     <a:bodyPr/>
@@ -13812,7 +13812,7 @@
                   </a:tcPr>
                 </a:tc>
               </a:tr>
-              <a:tr h="265176">
+              <a:tr h="239573">
                 <a:tc>
                   <a:txBody>
                     <a:bodyPr/>
@@ -14075,7 +14075,7 @@
                   </a:tcPr>
                 </a:tc>
               </a:tr>
-              <a:tr h="265176">
+              <a:tr h="239573">
                 <a:tc>
                   <a:txBody>
                     <a:bodyPr/>
@@ -14338,7 +14338,7 @@
                   </a:tcPr>
                 </a:tc>
               </a:tr>
-              <a:tr h="265176">
+              <a:tr h="239573">
                 <a:tc>
                   <a:txBody>
                     <a:bodyPr/>
@@ -14590,7 +14590,7 @@
                   </a:tcPr>
                 </a:tc>
               </a:tr>
-              <a:tr h="265176">
+              <a:tr h="239573">
                 <a:tc>
                   <a:txBody>
                     <a:bodyPr/>
@@ -14842,7 +14842,7 @@
                   </a:tcPr>
                 </a:tc>
               </a:tr>
-              <a:tr h="265176">
+              <a:tr h="239573">
                 <a:tc>
                   <a:txBody>
                     <a:bodyPr/>
@@ -15105,7 +15105,7 @@
                   </a:tcPr>
                 </a:tc>
               </a:tr>
-              <a:tr h="265176">
+              <a:tr h="239573">
                 <a:tc>
                   <a:txBody>
                     <a:bodyPr/>
@@ -15123,7 +15123,7 @@
                           <a:ea typeface="Arial" pitchFamily="34" charset="-122"/>
                           <a:cs typeface="Arial" pitchFamily="34" charset="-120"/>
                         </a:rPr>
-                        <a:t>Urine drugs-of-abuse screen</a:t>
+                        <a:t>Urine drugs-of-abuse screen (add-on)</a:t>
                       </a:r>
                       <a:endParaRPr lang="en-US" sz="1100" dirty="0">
                         <a:latin typeface="Arial" charset="0"/>
@@ -15191,7 +15191,7 @@
                           <a:ea typeface="Arial" pitchFamily="34" charset="-122"/>
                           <a:cs typeface="Arial" pitchFamily="34" charset="-120"/>
                         </a:rPr>
-                        <a:t>Add-on</a:t>
+                        <a:t>₹1,999</a:t>
                       </a:r>
                       <a:endParaRPr lang="en-US" sz="1050" dirty="0">
                         <a:latin typeface="Arial" charset="0"/>
@@ -15259,7 +15259,7 @@
                           <a:ea typeface="Arial" pitchFamily="34" charset="-122"/>
                           <a:cs typeface="Arial" pitchFamily="34" charset="-120"/>
                         </a:rPr>
-                        <a:t>Add-on</a:t>
+                        <a:t>₹1,999</a:t>
                       </a:r>
                       <a:endParaRPr lang="en-US" sz="1050" dirty="0">
                         <a:latin typeface="Arial" charset="0"/>
@@ -15327,7 +15327,7 @@
                           <a:ea typeface="Arial" pitchFamily="34" charset="-122"/>
                           <a:cs typeface="Arial" pitchFamily="34" charset="-120"/>
                         </a:rPr>
-                        <a:t>Add-on</a:t>
+                        <a:t>₹1,999</a:t>
                       </a:r>
                       <a:endParaRPr lang="en-US" sz="1050" dirty="0">
                         <a:latin typeface="Arial" charset="0"/>
@@ -15379,7 +15379,7 @@
                   </a:tcPr>
                 </a:tc>
               </a:tr>
-              <a:tr h="265176">
+              <a:tr h="239573">
                 <a:tc>
                   <a:txBody>
                     <a:bodyPr/>
@@ -15604,6 +15604,554 @@
                         <a:t>●</a:t>
                       </a:r>
                       <a:endParaRPr lang="en-US" sz="1100" dirty="0">
+                        <a:latin typeface="Arial" charset="0"/>
+                        <a:ea typeface="Arial" charset="0"/>
+                        <a:cs typeface="Arial" charset="0"/>
+                      </a:endParaRPr>
+                    </a:p>
+                  </a:txBody>
+                  <a:tcPr marL="73152" marR="73152" marT="27432" marB="27432" anchor="ctr">
+                    <a:lnL w="6350" cap="flat" cmpd="sng" algn="ctr">
+                      <a:solidFill>
+                        <a:srgbClr val="D6E0EE"/>
+                      </a:solidFill>
+                      <a:prstDash val="solid"/>
+                      <a:round/>
+                      <a:headEnd type="none" w="med" len="med"/>
+                      <a:tailEnd type="none" w="med" len="med"/>
+                    </a:lnL>
+                    <a:lnR w="6350" cap="flat" cmpd="sng" algn="ctr">
+                      <a:solidFill>
+                        <a:srgbClr val="D6E0EE"/>
+                      </a:solidFill>
+                      <a:prstDash val="solid"/>
+                      <a:round/>
+                      <a:headEnd type="none" w="med" len="med"/>
+                      <a:tailEnd type="none" w="med" len="med"/>
+                    </a:lnR>
+                    <a:lnT w="6350" cap="flat" cmpd="sng" algn="ctr">
+                      <a:solidFill>
+                        <a:srgbClr val="D6E0EE"/>
+                      </a:solidFill>
+                      <a:prstDash val="solid"/>
+                      <a:round/>
+                      <a:headEnd type="none" w="med" len="med"/>
+                      <a:tailEnd type="none" w="med" len="med"/>
+                    </a:lnT>
+                    <a:lnB w="6350" cap="flat" cmpd="sng" algn="ctr">
+                      <a:solidFill>
+                        <a:srgbClr val="D6E0EE"/>
+                      </a:solidFill>
+                      <a:prstDash val="solid"/>
+                      <a:round/>
+                      <a:headEnd type="none" w="med" len="med"/>
+                      <a:tailEnd type="none" w="med" len="med"/>
+                    </a:lnB>
+                    <a:solidFill>
+                      <a:srgbClr val="FFFFFF"/>
+                    </a:solidFill>
+                  </a:tcPr>
+                </a:tc>
+              </a:tr>
+              <a:tr h="239573">
+                <a:tc>
+                  <a:txBody>
+                    <a:bodyPr/>
+                    <a:lstStyle/>
+                    <a:p>
+                      <a:pPr indent="0" marL="0">
+                        <a:buNone/>
+                      </a:pPr>
+                      <a:r>
+                        <a:rPr lang="en-US" sz="1200" b="1" dirty="0">
+                          <a:solidFill>
+                            <a:srgbClr val="FFFFFF"/>
+                          </a:solidFill>
+                          <a:latin typeface="Arial" pitchFamily="34" charset="0"/>
+                          <a:ea typeface="Arial" pitchFamily="34" charset="-122"/>
+                          <a:cs typeface="Arial" pitchFamily="34" charset="-120"/>
+                        </a:rPr>
+                        <a:t>Package price</a:t>
+                      </a:r>
+                      <a:endParaRPr lang="en-US" sz="1200" dirty="0">
+                        <a:latin typeface="Arial" charset="0"/>
+                        <a:ea typeface="Arial" charset="0"/>
+                        <a:cs typeface="Arial" charset="0"/>
+                      </a:endParaRPr>
+                    </a:p>
+                  </a:txBody>
+                  <a:tcPr marL="73152" marR="73152" marT="27432" marB="27432" anchor="ctr">
+                    <a:lnL w="6350" cap="flat" cmpd="sng" algn="ctr">
+                      <a:solidFill>
+                        <a:srgbClr val="D6E0EE"/>
+                      </a:solidFill>
+                      <a:prstDash val="solid"/>
+                      <a:round/>
+                      <a:headEnd type="none" w="med" len="med"/>
+                      <a:tailEnd type="none" w="med" len="med"/>
+                    </a:lnL>
+                    <a:lnR w="6350" cap="flat" cmpd="sng" algn="ctr">
+                      <a:solidFill>
+                        <a:srgbClr val="D6E0EE"/>
+                      </a:solidFill>
+                      <a:prstDash val="solid"/>
+                      <a:round/>
+                      <a:headEnd type="none" w="med" len="med"/>
+                      <a:tailEnd type="none" w="med" len="med"/>
+                    </a:lnR>
+                    <a:lnT w="6350" cap="flat" cmpd="sng" algn="ctr">
+                      <a:solidFill>
+                        <a:srgbClr val="D6E0EE"/>
+                      </a:solidFill>
+                      <a:prstDash val="solid"/>
+                      <a:round/>
+                      <a:headEnd type="none" w="med" len="med"/>
+                      <a:tailEnd type="none" w="med" len="med"/>
+                    </a:lnT>
+                    <a:lnB w="6350" cap="flat" cmpd="sng" algn="ctr">
+                      <a:solidFill>
+                        <a:srgbClr val="D6E0EE"/>
+                      </a:solidFill>
+                      <a:prstDash val="solid"/>
+                      <a:round/>
+                      <a:headEnd type="none" w="med" len="med"/>
+                      <a:tailEnd type="none" w="med" len="med"/>
+                    </a:lnB>
+                    <a:solidFill>
+                      <a:srgbClr val="0F1A2E"/>
+                    </a:solidFill>
+                  </a:tcPr>
+                </a:tc>
+                <a:tc>
+                  <a:txBody>
+                    <a:bodyPr/>
+                    <a:lstStyle/>
+                    <a:p>
+                      <a:pPr algn="ctr" indent="0" marL="0">
+                        <a:buNone/>
+                      </a:pPr>
+                      <a:r>
+                        <a:rPr lang="en-US" sz="1250" b="1" dirty="0">
+                          <a:solidFill>
+                            <a:srgbClr val="FFFFFF"/>
+                          </a:solidFill>
+                          <a:latin typeface="Arial" pitchFamily="34" charset="0"/>
+                          <a:ea typeface="Arial" pitchFamily="34" charset="-122"/>
+                          <a:cs typeface="Arial" pitchFamily="34" charset="-120"/>
+                        </a:rPr>
+                        <a:t>₹2,999</a:t>
+                      </a:r>
+                      <a:endParaRPr lang="en-US" sz="1250" dirty="0">
+                        <a:latin typeface="Arial" charset="0"/>
+                        <a:ea typeface="Arial" charset="0"/>
+                        <a:cs typeface="Arial" charset="0"/>
+                      </a:endParaRPr>
+                    </a:p>
+                  </a:txBody>
+                  <a:tcPr marL="73152" marR="73152" marT="27432" marB="27432" anchor="ctr">
+                    <a:lnL w="6350" cap="flat" cmpd="sng" algn="ctr">
+                      <a:solidFill>
+                        <a:srgbClr val="D6E0EE"/>
+                      </a:solidFill>
+                      <a:prstDash val="solid"/>
+                      <a:round/>
+                      <a:headEnd type="none" w="med" len="med"/>
+                      <a:tailEnd type="none" w="med" len="med"/>
+                    </a:lnL>
+                    <a:lnR w="6350" cap="flat" cmpd="sng" algn="ctr">
+                      <a:solidFill>
+                        <a:srgbClr val="D6E0EE"/>
+                      </a:solidFill>
+                      <a:prstDash val="solid"/>
+                      <a:round/>
+                      <a:headEnd type="none" w="med" len="med"/>
+                      <a:tailEnd type="none" w="med" len="med"/>
+                    </a:lnR>
+                    <a:lnT w="6350" cap="flat" cmpd="sng" algn="ctr">
+                      <a:solidFill>
+                        <a:srgbClr val="D6E0EE"/>
+                      </a:solidFill>
+                      <a:prstDash val="solid"/>
+                      <a:round/>
+                      <a:headEnd type="none" w="med" len="med"/>
+                      <a:tailEnd type="none" w="med" len="med"/>
+                    </a:lnT>
+                    <a:lnB w="6350" cap="flat" cmpd="sng" algn="ctr">
+                      <a:solidFill>
+                        <a:srgbClr val="D6E0EE"/>
+                      </a:solidFill>
+                      <a:prstDash val="solid"/>
+                      <a:round/>
+                      <a:headEnd type="none" w="med" len="med"/>
+                      <a:tailEnd type="none" w="med" len="med"/>
+                    </a:lnB>
+                    <a:solidFill>
+                      <a:srgbClr val="0F1A2E"/>
+                    </a:solidFill>
+                  </a:tcPr>
+                </a:tc>
+                <a:tc>
+                  <a:txBody>
+                    <a:bodyPr/>
+                    <a:lstStyle/>
+                    <a:p>
+                      <a:pPr algn="ctr" indent="0" marL="0">
+                        <a:buNone/>
+                      </a:pPr>
+                      <a:r>
+                        <a:rPr lang="en-US" sz="1250" b="1" dirty="0">
+                          <a:solidFill>
+                            <a:srgbClr val="FFFFFF"/>
+                          </a:solidFill>
+                          <a:latin typeface="Arial" pitchFamily="34" charset="0"/>
+                          <a:ea typeface="Arial" pitchFamily="34" charset="-122"/>
+                          <a:cs typeface="Arial" pitchFamily="34" charset="-120"/>
+                        </a:rPr>
+                        <a:t>₹8,999</a:t>
+                      </a:r>
+                      <a:endParaRPr lang="en-US" sz="1250" dirty="0">
+                        <a:latin typeface="Arial" charset="0"/>
+                        <a:ea typeface="Arial" charset="0"/>
+                        <a:cs typeface="Arial" charset="0"/>
+                      </a:endParaRPr>
+                    </a:p>
+                  </a:txBody>
+                  <a:tcPr marL="73152" marR="73152" marT="27432" marB="27432" anchor="ctr">
+                    <a:lnL w="6350" cap="flat" cmpd="sng" algn="ctr">
+                      <a:solidFill>
+                        <a:srgbClr val="D6E0EE"/>
+                      </a:solidFill>
+                      <a:prstDash val="solid"/>
+                      <a:round/>
+                      <a:headEnd type="none" w="med" len="med"/>
+                      <a:tailEnd type="none" w="med" len="med"/>
+                    </a:lnL>
+                    <a:lnR w="6350" cap="flat" cmpd="sng" algn="ctr">
+                      <a:solidFill>
+                        <a:srgbClr val="D6E0EE"/>
+                      </a:solidFill>
+                      <a:prstDash val="solid"/>
+                      <a:round/>
+                      <a:headEnd type="none" w="med" len="med"/>
+                      <a:tailEnd type="none" w="med" len="med"/>
+                    </a:lnR>
+                    <a:lnT w="6350" cap="flat" cmpd="sng" algn="ctr">
+                      <a:solidFill>
+                        <a:srgbClr val="D6E0EE"/>
+                      </a:solidFill>
+                      <a:prstDash val="solid"/>
+                      <a:round/>
+                      <a:headEnd type="none" w="med" len="med"/>
+                      <a:tailEnd type="none" w="med" len="med"/>
+                    </a:lnT>
+                    <a:lnB w="6350" cap="flat" cmpd="sng" algn="ctr">
+                      <a:solidFill>
+                        <a:srgbClr val="D6E0EE"/>
+                      </a:solidFill>
+                      <a:prstDash val="solid"/>
+                      <a:round/>
+                      <a:headEnd type="none" w="med" len="med"/>
+                      <a:tailEnd type="none" w="med" len="med"/>
+                    </a:lnB>
+                    <a:solidFill>
+                      <a:srgbClr val="0F1A2E"/>
+                    </a:solidFill>
+                  </a:tcPr>
+                </a:tc>
+                <a:tc>
+                  <a:txBody>
+                    <a:bodyPr/>
+                    <a:lstStyle/>
+                    <a:p>
+                      <a:pPr algn="ctr" indent="0" marL="0">
+                        <a:buNone/>
+                      </a:pPr>
+                      <a:r>
+                        <a:rPr lang="en-US" sz="1250" b="1" dirty="0">
+                          <a:solidFill>
+                            <a:srgbClr val="FFFFFF"/>
+                          </a:solidFill>
+                          <a:latin typeface="Arial" pitchFamily="34" charset="0"/>
+                          <a:ea typeface="Arial" pitchFamily="34" charset="-122"/>
+                          <a:cs typeface="Arial" pitchFamily="34" charset="-120"/>
+                        </a:rPr>
+                        <a:t>₹12,999</a:t>
+                      </a:r>
+                      <a:endParaRPr lang="en-US" sz="1250" dirty="0">
+                        <a:latin typeface="Arial" charset="0"/>
+                        <a:ea typeface="Arial" charset="0"/>
+                        <a:cs typeface="Arial" charset="0"/>
+                      </a:endParaRPr>
+                    </a:p>
+                  </a:txBody>
+                  <a:tcPr marL="73152" marR="73152" marT="27432" marB="27432" anchor="ctr">
+                    <a:lnL w="6350" cap="flat" cmpd="sng" algn="ctr">
+                      <a:solidFill>
+                        <a:srgbClr val="D6E0EE"/>
+                      </a:solidFill>
+                      <a:prstDash val="solid"/>
+                      <a:round/>
+                      <a:headEnd type="none" w="med" len="med"/>
+                      <a:tailEnd type="none" w="med" len="med"/>
+                    </a:lnL>
+                    <a:lnR w="6350" cap="flat" cmpd="sng" algn="ctr">
+                      <a:solidFill>
+                        <a:srgbClr val="D6E0EE"/>
+                      </a:solidFill>
+                      <a:prstDash val="solid"/>
+                      <a:round/>
+                      <a:headEnd type="none" w="med" len="med"/>
+                      <a:tailEnd type="none" w="med" len="med"/>
+                    </a:lnR>
+                    <a:lnT w="6350" cap="flat" cmpd="sng" algn="ctr">
+                      <a:solidFill>
+                        <a:srgbClr val="D6E0EE"/>
+                      </a:solidFill>
+                      <a:prstDash val="solid"/>
+                      <a:round/>
+                      <a:headEnd type="none" w="med" len="med"/>
+                      <a:tailEnd type="none" w="med" len="med"/>
+                    </a:lnT>
+                    <a:lnB w="6350" cap="flat" cmpd="sng" algn="ctr">
+                      <a:solidFill>
+                        <a:srgbClr val="D6E0EE"/>
+                      </a:solidFill>
+                      <a:prstDash val="solid"/>
+                      <a:round/>
+                      <a:headEnd type="none" w="med" len="med"/>
+                      <a:tailEnd type="none" w="med" len="med"/>
+                    </a:lnB>
+                    <a:solidFill>
+                      <a:srgbClr val="0F1A2E"/>
+                    </a:solidFill>
+                  </a:tcPr>
+                </a:tc>
+              </a:tr>
+              <a:tr h="239573">
+                <a:tc>
+                  <a:txBody>
+                    <a:bodyPr/>
+                    <a:lstStyle/>
+                    <a:p>
+                      <a:pPr indent="0" marL="0">
+                        <a:buNone/>
+                      </a:pPr>
+                      <a:r>
+                        <a:rPr lang="en-US" sz="1100" b="1" dirty="0">
+                          <a:solidFill>
+                            <a:srgbClr val="0F172A"/>
+                          </a:solidFill>
+                          <a:latin typeface="Arial" pitchFamily="34" charset="0"/>
+                          <a:ea typeface="Arial" pitchFamily="34" charset="-122"/>
+                          <a:cs typeface="Arial" pitchFamily="34" charset="-120"/>
+                        </a:rPr>
+                        <a:t>Gym-partner member price</a:t>
+                      </a:r>
+                      <a:endParaRPr lang="en-US" sz="1100" dirty="0">
+                        <a:latin typeface="Arial" charset="0"/>
+                        <a:ea typeface="Arial" charset="0"/>
+                        <a:cs typeface="Arial" charset="0"/>
+                      </a:endParaRPr>
+                    </a:p>
+                  </a:txBody>
+                  <a:tcPr marL="73152" marR="73152" marT="27432" marB="27432" anchor="ctr">
+                    <a:lnL w="6350" cap="flat" cmpd="sng" algn="ctr">
+                      <a:solidFill>
+                        <a:srgbClr val="D6E0EE"/>
+                      </a:solidFill>
+                      <a:prstDash val="solid"/>
+                      <a:round/>
+                      <a:headEnd type="none" w="med" len="med"/>
+                      <a:tailEnd type="none" w="med" len="med"/>
+                    </a:lnL>
+                    <a:lnR w="6350" cap="flat" cmpd="sng" algn="ctr">
+                      <a:solidFill>
+                        <a:srgbClr val="D6E0EE"/>
+                      </a:solidFill>
+                      <a:prstDash val="solid"/>
+                      <a:round/>
+                      <a:headEnd type="none" w="med" len="med"/>
+                      <a:tailEnd type="none" w="med" len="med"/>
+                    </a:lnR>
+                    <a:lnT w="6350" cap="flat" cmpd="sng" algn="ctr">
+                      <a:solidFill>
+                        <a:srgbClr val="D6E0EE"/>
+                      </a:solidFill>
+                      <a:prstDash val="solid"/>
+                      <a:round/>
+                      <a:headEnd type="none" w="med" len="med"/>
+                      <a:tailEnd type="none" w="med" len="med"/>
+                    </a:lnT>
+                    <a:lnB w="6350" cap="flat" cmpd="sng" algn="ctr">
+                      <a:solidFill>
+                        <a:srgbClr val="D6E0EE"/>
+                      </a:solidFill>
+                      <a:prstDash val="solid"/>
+                      <a:round/>
+                      <a:headEnd type="none" w="med" len="med"/>
+                      <a:tailEnd type="none" w="med" len="med"/>
+                    </a:lnB>
+                    <a:solidFill>
+                      <a:srgbClr val="FFFFFF"/>
+                    </a:solidFill>
+                  </a:tcPr>
+                </a:tc>
+                <a:tc>
+                  <a:txBody>
+                    <a:bodyPr/>
+                    <a:lstStyle/>
+                    <a:p>
+                      <a:pPr algn="ctr" indent="0" marL="0">
+                        <a:buNone/>
+                      </a:pPr>
+                      <a:r>
+                        <a:rPr lang="en-US" sz="1050" b="1" dirty="0">
+                          <a:solidFill>
+                            <a:srgbClr val="2563EB"/>
+                          </a:solidFill>
+                          <a:latin typeface="Arial" pitchFamily="34" charset="0"/>
+                          <a:ea typeface="Arial" pitchFamily="34" charset="-122"/>
+                          <a:cs typeface="Arial" pitchFamily="34" charset="-120"/>
+                        </a:rPr>
+                        <a:t>₹2,699</a:t>
+                      </a:r>
+                      <a:endParaRPr lang="en-US" sz="1050" dirty="0">
+                        <a:latin typeface="Arial" charset="0"/>
+                        <a:ea typeface="Arial" charset="0"/>
+                        <a:cs typeface="Arial" charset="0"/>
+                      </a:endParaRPr>
+                    </a:p>
+                  </a:txBody>
+                  <a:tcPr marL="73152" marR="73152" marT="27432" marB="27432" anchor="ctr">
+                    <a:lnL w="6350" cap="flat" cmpd="sng" algn="ctr">
+                      <a:solidFill>
+                        <a:srgbClr val="D6E0EE"/>
+                      </a:solidFill>
+                      <a:prstDash val="solid"/>
+                      <a:round/>
+                      <a:headEnd type="none" w="med" len="med"/>
+                      <a:tailEnd type="none" w="med" len="med"/>
+                    </a:lnL>
+                    <a:lnR w="6350" cap="flat" cmpd="sng" algn="ctr">
+                      <a:solidFill>
+                        <a:srgbClr val="D6E0EE"/>
+                      </a:solidFill>
+                      <a:prstDash val="solid"/>
+                      <a:round/>
+                      <a:headEnd type="none" w="med" len="med"/>
+                      <a:tailEnd type="none" w="med" len="med"/>
+                    </a:lnR>
+                    <a:lnT w="6350" cap="flat" cmpd="sng" algn="ctr">
+                      <a:solidFill>
+                        <a:srgbClr val="D6E0EE"/>
+                      </a:solidFill>
+                      <a:prstDash val="solid"/>
+                      <a:round/>
+                      <a:headEnd type="none" w="med" len="med"/>
+                      <a:tailEnd type="none" w="med" len="med"/>
+                    </a:lnT>
+                    <a:lnB w="6350" cap="flat" cmpd="sng" algn="ctr">
+                      <a:solidFill>
+                        <a:srgbClr val="D6E0EE"/>
+                      </a:solidFill>
+                      <a:prstDash val="solid"/>
+                      <a:round/>
+                      <a:headEnd type="none" w="med" len="med"/>
+                      <a:tailEnd type="none" w="med" len="med"/>
+                    </a:lnB>
+                    <a:solidFill>
+                      <a:srgbClr val="FFFFFF"/>
+                    </a:solidFill>
+                  </a:tcPr>
+                </a:tc>
+                <a:tc>
+                  <a:txBody>
+                    <a:bodyPr/>
+                    <a:lstStyle/>
+                    <a:p>
+                      <a:pPr algn="ctr" indent="0" marL="0">
+                        <a:buNone/>
+                      </a:pPr>
+                      <a:r>
+                        <a:rPr lang="en-US" sz="1050" b="1" dirty="0">
+                          <a:solidFill>
+                            <a:srgbClr val="2563EB"/>
+                          </a:solidFill>
+                          <a:latin typeface="Arial" pitchFamily="34" charset="0"/>
+                          <a:ea typeface="Arial" pitchFamily="34" charset="-122"/>
+                          <a:cs typeface="Arial" pitchFamily="34" charset="-120"/>
+                        </a:rPr>
+                        <a:t>₹8,099</a:t>
+                      </a:r>
+                      <a:endParaRPr lang="en-US" sz="1050" dirty="0">
+                        <a:latin typeface="Arial" charset="0"/>
+                        <a:ea typeface="Arial" charset="0"/>
+                        <a:cs typeface="Arial" charset="0"/>
+                      </a:endParaRPr>
+                    </a:p>
+                  </a:txBody>
+                  <a:tcPr marL="73152" marR="73152" marT="27432" marB="27432" anchor="ctr">
+                    <a:lnL w="6350" cap="flat" cmpd="sng" algn="ctr">
+                      <a:solidFill>
+                        <a:srgbClr val="D6E0EE"/>
+                      </a:solidFill>
+                      <a:prstDash val="solid"/>
+                      <a:round/>
+                      <a:headEnd type="none" w="med" len="med"/>
+                      <a:tailEnd type="none" w="med" len="med"/>
+                    </a:lnL>
+                    <a:lnR w="6350" cap="flat" cmpd="sng" algn="ctr">
+                      <a:solidFill>
+                        <a:srgbClr val="D6E0EE"/>
+                      </a:solidFill>
+                      <a:prstDash val="solid"/>
+                      <a:round/>
+                      <a:headEnd type="none" w="med" len="med"/>
+                      <a:tailEnd type="none" w="med" len="med"/>
+                    </a:lnR>
+                    <a:lnT w="6350" cap="flat" cmpd="sng" algn="ctr">
+                      <a:solidFill>
+                        <a:srgbClr val="D6E0EE"/>
+                      </a:solidFill>
+                      <a:prstDash val="solid"/>
+                      <a:round/>
+                      <a:headEnd type="none" w="med" len="med"/>
+                      <a:tailEnd type="none" w="med" len="med"/>
+                    </a:lnT>
+                    <a:lnB w="6350" cap="flat" cmpd="sng" algn="ctr">
+                      <a:solidFill>
+                        <a:srgbClr val="D6E0EE"/>
+                      </a:solidFill>
+                      <a:prstDash val="solid"/>
+                      <a:round/>
+                      <a:headEnd type="none" w="med" len="med"/>
+                      <a:tailEnd type="none" w="med" len="med"/>
+                    </a:lnB>
+                    <a:solidFill>
+                      <a:srgbClr val="FFFFFF"/>
+                    </a:solidFill>
+                  </a:tcPr>
+                </a:tc>
+                <a:tc>
+                  <a:txBody>
+                    <a:bodyPr/>
+                    <a:lstStyle/>
+                    <a:p>
+                      <a:pPr algn="ctr" indent="0" marL="0">
+                        <a:buNone/>
+                      </a:pPr>
+                      <a:r>
+                        <a:rPr lang="en-US" sz="1050" b="1" dirty="0">
+                          <a:solidFill>
+                            <a:srgbClr val="2563EB"/>
+                          </a:solidFill>
+                          <a:latin typeface="Arial" pitchFamily="34" charset="0"/>
+                          <a:ea typeface="Arial" pitchFamily="34" charset="-122"/>
+                          <a:cs typeface="Arial" pitchFamily="34" charset="-120"/>
+                        </a:rPr>
+                        <a:t>₹11,699</a:t>
+                      </a:r>
+                      <a:endParaRPr lang="en-US" sz="1050" dirty="0">
                         <a:latin typeface="Arial" charset="0"/>
                         <a:ea typeface="Arial" charset="0"/>
                         <a:cs typeface="Arial" charset="0"/>
